--- a/1.SLIDES/AULA_1_POO.pptx
+++ b/1.SLIDES/AULA_1_POO.pptx
@@ -282,7 +282,7 @@
           <a:p>
             <a:fld id="{D1D1EADE-8E88-4C7C-8AC5-FB148DE4940E}" type="datetime1">
               <a:rPr lang="en-US" smtClean="0"/>
-              <a:t>12/5/2025</a:t>
+              <a:t>1/19/2026</a:t>
             </a:fld>
             <a:endParaRPr lang="en-US"/>
           </a:p>
@@ -482,7 +482,7 @@
           <a:p>
             <a:fld id="{EC3C8B9C-477D-492A-96AD-1FC2CC997A73}" type="datetime1">
               <a:rPr lang="en-US" smtClean="0"/>
-              <a:t>12/5/2025</a:t>
+              <a:t>1/19/2026</a:t>
             </a:fld>
             <a:endParaRPr lang="en-US"/>
           </a:p>
@@ -692,7 +692,7 @@
           <a:p>
             <a:fld id="{42D3AED5-E26D-4E29-B1B3-7847B6779594}" type="datetime1">
               <a:rPr lang="en-US" smtClean="0"/>
-              <a:t>12/5/2025</a:t>
+              <a:t>1/19/2026</a:t>
             </a:fld>
             <a:endParaRPr lang="en-US"/>
           </a:p>
@@ -892,7 +892,7 @@
           <a:p>
             <a:fld id="{157B6794-849E-4626-908B-D15793550EFB}" type="datetime1">
               <a:rPr lang="en-US" smtClean="0"/>
-              <a:t>12/5/2025</a:t>
+              <a:t>1/19/2026</a:t>
             </a:fld>
             <a:endParaRPr lang="en-US"/>
           </a:p>
@@ -1168,7 +1168,7 @@
           <a:p>
             <a:fld id="{63DB64E7-5594-42A3-ADBF-E95A7ACEAD64}" type="datetime1">
               <a:rPr lang="en-US" smtClean="0"/>
-              <a:t>12/5/2025</a:t>
+              <a:t>1/19/2026</a:t>
             </a:fld>
             <a:endParaRPr lang="en-US"/>
           </a:p>
@@ -1441,7 +1441,7 @@
           <a:p>
             <a:fld id="{18462B0B-D248-4FFB-8695-AD7FA4B1284A}" type="datetime1">
               <a:rPr lang="en-US" smtClean="0"/>
-              <a:t>12/5/2025</a:t>
+              <a:t>1/19/2026</a:t>
             </a:fld>
             <a:endParaRPr lang="en-US"/>
           </a:p>
@@ -1864,7 +1864,7 @@
           <a:p>
             <a:fld id="{D0378EFB-9159-4510-B73F-4F0409ADE937}" type="datetime1">
               <a:rPr lang="en-US" smtClean="0"/>
-              <a:t>12/5/2025</a:t>
+              <a:t>1/19/2026</a:t>
             </a:fld>
             <a:endParaRPr lang="en-US"/>
           </a:p>
@@ -2006,7 +2006,7 @@
           <a:p>
             <a:fld id="{89BC9412-2452-4BED-A324-9D8C115361AD}" type="datetime1">
               <a:rPr lang="en-US" smtClean="0"/>
-              <a:t>12/5/2025</a:t>
+              <a:t>1/19/2026</a:t>
             </a:fld>
             <a:endParaRPr lang="en-US"/>
           </a:p>
@@ -2119,7 +2119,7 @@
           <a:p>
             <a:fld id="{F5318F62-D251-40E8-A23C-F4CFE9FEAB41}" type="datetime1">
               <a:rPr lang="en-US" smtClean="0"/>
-              <a:t>12/5/2025</a:t>
+              <a:t>1/19/2026</a:t>
             </a:fld>
             <a:endParaRPr lang="en-US"/>
           </a:p>
@@ -2432,7 +2432,7 @@
           <a:p>
             <a:fld id="{44F76144-149E-4874-93A5-554A0357CF82}" type="datetime1">
               <a:rPr lang="en-US" smtClean="0"/>
-              <a:t>12/5/2025</a:t>
+              <a:t>1/19/2026</a:t>
             </a:fld>
             <a:endParaRPr lang="en-US"/>
           </a:p>
@@ -2725,7 +2725,7 @@
           <a:p>
             <a:fld id="{50BA65D8-0540-4835-AE5C-25D29DBA01BE}" type="datetime1">
               <a:rPr lang="en-US" smtClean="0"/>
-              <a:t>12/5/2025</a:t>
+              <a:t>1/19/2026</a:t>
             </a:fld>
             <a:endParaRPr lang="en-US"/>
           </a:p>
@@ -2967,7 +2967,7 @@
           <a:p>
             <a:fld id="{E31BA835-12AC-4E8F-955A-EA3F4DE2791F}" type="datetime1">
               <a:rPr lang="en-US" smtClean="0"/>
-              <a:t>12/5/2025</a:t>
+              <a:t>1/19/2026</a:t>
             </a:fld>
             <a:endParaRPr lang="en-US"/>
           </a:p>
@@ -3673,8 +3673,13 @@
           <a:p>
             <a:r>
               <a:rPr lang="en-US" sz="3600" dirty="0"/>
-              <a:t>python</a:t>
-            </a:r>
+              <a:t>Python - </a:t>
+            </a:r>
+            <a:r>
+              <a:rPr lang="en-US" sz="3600" dirty="0" err="1"/>
+              <a:t>Fundamentos</a:t>
+            </a:r>
+            <a:endParaRPr lang="en-US" sz="3600" dirty="0"/>
           </a:p>
         </p:txBody>
       </p:sp>
@@ -3832,60 +3837,6 @@
             <a:r>
               <a:rPr lang="en-US" sz="6600" dirty="0"/>
               <a:t>PROGRAMAÇÃO ORIENTADA A OBJETO (POO)</a:t>
-            </a:r>
-          </a:p>
-        </p:txBody>
-      </p:sp>
-      <p:sp>
-        <p:nvSpPr>
-          <p:cNvPr id="5" name="Título 1">
-            <a:extLst>
-              <a:ext uri="{FF2B5EF4-FFF2-40B4-BE49-F238E27FC236}">
-                <a16:creationId xmlns:a16="http://schemas.microsoft.com/office/drawing/2014/main" id="{A1C88A2C-52E3-1B79-C8D3-8148B6EC1A2E}"/>
-              </a:ext>
-            </a:extLst>
-          </p:cNvPr>
-          <p:cNvSpPr txBox="1">
-            <a:spLocks/>
-          </p:cNvSpPr>
-          <p:nvPr/>
-        </p:nvSpPr>
-        <p:spPr>
-          <a:xfrm>
-            <a:off x="8112642" y="5124449"/>
-            <a:ext cx="3125084" cy="709392"/>
-          </a:xfrm>
-          <a:prstGeom prst="rect">
-            <a:avLst/>
-          </a:prstGeom>
-        </p:spPr>
-        <p:txBody>
-          <a:bodyPr vert="horz" lIns="91440" tIns="45720" rIns="91440" bIns="45720" rtlCol="0" anchor="t">
-            <a:normAutofit/>
-          </a:bodyPr>
-          <a:lstStyle>
-            <a:lvl1pPr algn="l" defTabSz="914400" rtl="0" eaLnBrk="1" latinLnBrk="0" hangingPunct="1">
-              <a:lnSpc>
-                <a:spcPct val="100000"/>
-              </a:lnSpc>
-              <a:spcBef>
-                <a:spcPct val="0"/>
-              </a:spcBef>
-              <a:buNone/>
-              <a:defRPr sz="4000" kern="1200" cap="all" spc="30" baseline="0">
-                <a:solidFill>
-                  <a:schemeClr val="tx1"/>
-                </a:solidFill>
-                <a:latin typeface="+mj-lt"/>
-                <a:ea typeface="+mj-ea"/>
-                <a:cs typeface="+mj-cs"/>
-              </a:defRPr>
-            </a:lvl1pPr>
-          </a:lstStyle>
-          <a:p>
-            <a:r>
-              <a:rPr lang="en-US" sz="3600" dirty="0"/>
-              <a:t>Prof: Helena</a:t>
             </a:r>
           </a:p>
         </p:txBody>
@@ -10706,187 +10657,45 @@
           </a:fontRef>
         </p:style>
       </p:cxnSp>
-      <p:sp>
-        <p:nvSpPr>
-          <p:cNvPr id="7" name="CaixaDeTexto 6">
-            <a:extLst>
-              <a:ext uri="{FF2B5EF4-FFF2-40B4-BE49-F238E27FC236}">
-                <a16:creationId xmlns:a16="http://schemas.microsoft.com/office/drawing/2014/main" id="{F21B6EBB-8DB1-4922-C418-6E909D37C1CC}"/>
-              </a:ext>
-            </a:extLst>
-          </p:cNvPr>
-          <p:cNvSpPr txBox="1"/>
-          <p:nvPr/>
-        </p:nvSpPr>
-        <p:spPr>
-          <a:xfrm>
-            <a:off x="800100" y="4039453"/>
-            <a:ext cx="4396902" cy="369332"/>
+      <p:pic>
+        <p:nvPicPr>
+          <p:cNvPr id="2" name="Espaço Reservado para Conteúdo 4" descr="Interface gráfica do usuário, Diagrama&#10;&#10;O conteúdo gerado por IA pode estar incorreto.">
+            <a:extLst>
+              <a:ext uri="{FF2B5EF4-FFF2-40B4-BE49-F238E27FC236}">
+                <a16:creationId xmlns:a16="http://schemas.microsoft.com/office/drawing/2014/main" id="{2FD611B1-7A65-C35E-B8B0-FFBF6849EC30}"/>
+              </a:ext>
+            </a:extLst>
+          </p:cNvPr>
+          <p:cNvPicPr>
+            <a:picLocks noGrp="1" noChangeAspect="1"/>
+          </p:cNvPicPr>
+          <p:nvPr>
+            <p:ph idx="1"/>
+          </p:nvPr>
+        </p:nvPicPr>
+        <p:blipFill>
+          <a:blip r:embed="rId2">
+            <a:extLst>
+              <a:ext uri="{28A0092B-C50C-407E-A947-70E740481C1C}">
+                <a14:useLocalDpi xmlns:a14="http://schemas.microsoft.com/office/drawing/2010/main" val="0"/>
+              </a:ext>
+            </a:extLst>
+          </a:blip>
+          <a:srcRect b="1747"/>
+          <a:stretch>
+            <a:fillRect/>
+          </a:stretch>
+        </p:blipFill>
+        <p:spPr>
+          <a:xfrm>
+            <a:off x="20" y="10"/>
+            <a:ext cx="12191979" cy="6857989"/>
           </a:xfrm>
           <a:prstGeom prst="rect">
             <a:avLst/>
           </a:prstGeom>
-          <a:noFill/>
-        </p:spPr>
-        <p:txBody>
-          <a:bodyPr wrap="square" rtlCol="0">
-            <a:spAutoFit/>
-          </a:bodyPr>
-          <a:lstStyle/>
-          <a:p>
-            <a:r>
-              <a:rPr lang="pt-BR" dirty="0"/>
-              <a:t>Graduação em Sistemas da informação</a:t>
-            </a:r>
-          </a:p>
-        </p:txBody>
-      </p:sp>
-      <p:sp>
-        <p:nvSpPr>
-          <p:cNvPr id="11" name="CaixaDeTexto 10">
-            <a:extLst>
-              <a:ext uri="{FF2B5EF4-FFF2-40B4-BE49-F238E27FC236}">
-                <a16:creationId xmlns:a16="http://schemas.microsoft.com/office/drawing/2014/main" id="{2196F82C-8A14-5DF2-2B5F-88DB3E514DDC}"/>
-              </a:ext>
-            </a:extLst>
-          </p:cNvPr>
-          <p:cNvSpPr txBox="1"/>
-          <p:nvPr/>
-        </p:nvSpPr>
-        <p:spPr>
-          <a:xfrm>
-            <a:off x="800100" y="4939337"/>
-            <a:ext cx="4396902" cy="369332"/>
-          </a:xfrm>
-          <a:prstGeom prst="rect">
-            <a:avLst/>
-          </a:prstGeom>
-          <a:noFill/>
-        </p:spPr>
-        <p:txBody>
-          <a:bodyPr wrap="square" rtlCol="0">
-            <a:spAutoFit/>
-          </a:bodyPr>
-          <a:lstStyle/>
-          <a:p>
-            <a:r>
-              <a:rPr lang="pt-BR" dirty="0"/>
-              <a:t>www.linkedin.com/in/hnasc1989</a:t>
-            </a:r>
-          </a:p>
-        </p:txBody>
-      </p:sp>
-      <p:sp>
-        <p:nvSpPr>
-          <p:cNvPr id="13" name="CaixaDeTexto 12">
-            <a:extLst>
-              <a:ext uri="{FF2B5EF4-FFF2-40B4-BE49-F238E27FC236}">
-                <a16:creationId xmlns:a16="http://schemas.microsoft.com/office/drawing/2014/main" id="{BAB2519E-D327-2BDD-E4EB-A2B33EFE3A9E}"/>
-              </a:ext>
-            </a:extLst>
-          </p:cNvPr>
-          <p:cNvSpPr txBox="1"/>
-          <p:nvPr/>
-        </p:nvSpPr>
-        <p:spPr>
-          <a:xfrm>
-            <a:off x="800100" y="5308669"/>
-            <a:ext cx="4396902" cy="369332"/>
-          </a:xfrm>
-          <a:prstGeom prst="rect">
-            <a:avLst/>
-          </a:prstGeom>
-          <a:noFill/>
-        </p:spPr>
-        <p:txBody>
-          <a:bodyPr wrap="square" rtlCol="0">
-            <a:spAutoFit/>
-          </a:bodyPr>
-          <a:lstStyle/>
-          <a:p>
-            <a:r>
-              <a:rPr lang="pt-BR" dirty="0"/>
-              <a:t>https://github.com/HelenaNascimento</a:t>
-            </a:r>
-          </a:p>
-        </p:txBody>
-      </p:sp>
-      <p:sp>
-        <p:nvSpPr>
-          <p:cNvPr id="15" name="CaixaDeTexto 14">
-            <a:extLst>
-              <a:ext uri="{FF2B5EF4-FFF2-40B4-BE49-F238E27FC236}">
-                <a16:creationId xmlns:a16="http://schemas.microsoft.com/office/drawing/2014/main" id="{374910F4-C84A-94C2-5904-02575C8AD48A}"/>
-              </a:ext>
-            </a:extLst>
-          </p:cNvPr>
-          <p:cNvSpPr txBox="1"/>
-          <p:nvPr/>
-        </p:nvSpPr>
-        <p:spPr>
-          <a:xfrm>
-            <a:off x="800100" y="5692668"/>
-            <a:ext cx="4396902" cy="369332"/>
-          </a:xfrm>
-          <a:prstGeom prst="rect">
-            <a:avLst/>
-          </a:prstGeom>
-          <a:noFill/>
-        </p:spPr>
-        <p:txBody>
-          <a:bodyPr wrap="square" rtlCol="0">
-            <a:spAutoFit/>
-          </a:bodyPr>
-          <a:lstStyle/>
-          <a:p>
-            <a:r>
-              <a:rPr lang="pt-BR" dirty="0"/>
-              <a:t>https://medium.com/@hnasc.1989</a:t>
-            </a:r>
-          </a:p>
-        </p:txBody>
-      </p:sp>
-      <p:sp>
-        <p:nvSpPr>
-          <p:cNvPr id="17" name="CaixaDeTexto 16">
-            <a:extLst>
-              <a:ext uri="{FF2B5EF4-FFF2-40B4-BE49-F238E27FC236}">
-                <a16:creationId xmlns:a16="http://schemas.microsoft.com/office/drawing/2014/main" id="{3BB9A3E2-9E46-94F6-C59A-E59CE1C38A58}"/>
-              </a:ext>
-            </a:extLst>
-          </p:cNvPr>
-          <p:cNvSpPr txBox="1"/>
-          <p:nvPr/>
-        </p:nvSpPr>
-        <p:spPr>
-          <a:xfrm>
-            <a:off x="800100" y="4548392"/>
-            <a:ext cx="4396902" cy="923330"/>
-          </a:xfrm>
-          <a:prstGeom prst="rect">
-            <a:avLst/>
-          </a:prstGeom>
-          <a:noFill/>
-        </p:spPr>
-        <p:txBody>
-          <a:bodyPr wrap="square" rtlCol="0">
-            <a:spAutoFit/>
-          </a:bodyPr>
-          <a:lstStyle/>
-          <a:p>
-            <a:r>
-              <a:rPr lang="pt-BR" dirty="0"/>
-              <a:t>hnasc.1989@gmail.com</a:t>
-            </a:r>
-          </a:p>
-          <a:p>
-            <a:br>
-              <a:rPr lang="pt-BR" dirty="0"/>
-            </a:br>
-            <a:endParaRPr lang="pt-BR" dirty="0"/>
-          </a:p>
-        </p:txBody>
-      </p:sp>
+        </p:spPr>
+      </p:pic>
     </p:spTree>
     <p:extLst>
       <p:ext uri="{BB962C8B-B14F-4D97-AF65-F5344CB8AC3E}">
